--- a/templates/parr_report_template.pptx
+++ b/templates/parr_report_template.pptx
@@ -114,360 +114,6 @@
     </p:ext>
   </p:extLst>
 </p:presentation>
-</file>
-
-<file path=ppt/revisionInfo.xml><?xml version="1.0" encoding="utf-8"?>
-<p1510:revInfo xmlns:a="http://schemas.openxmlformats.org/drawingml/2006/main" xmlns:r="http://schemas.openxmlformats.org/officeDocument/2006/relationships" xmlns:p1510="http://schemas.microsoft.com/office/powerpoint/2015/10/main">
-  <p1510:revLst>
-    <p1510:client id="{E64715C6-2005-41F5-8C1F-EB905AC546B7}" v="2" dt="2026-09-10T08:29:52.498"/>
-  </p1510:revLst>
-</p1510:revInfo>
-</file>
-
-<file path=ppt/changesInfos/changesInfo1.xml><?xml version="1.0" encoding="utf-8"?>
-<pc:chgInfo xmlns:a="http://schemas.openxmlformats.org/drawingml/2006/main" xmlns:r="http://schemas.openxmlformats.org/officeDocument/2006/relationships" xmlns:ac="http://schemas.microsoft.com/office/drawing/2013/main/command" xmlns:pc="http://schemas.microsoft.com/office/powerpoint/2013/main/command">
-  <pc:docChgLst>
-    <pc:chgData name="MAKANAE Yuki/蒔苗幸(SAF事業 SAFプロジェクト2)" userId="174e2688-ec60-4193-ade0-f39569b7151e" providerId="ADAL" clId="{B448FFF6-F616-42CD-BE9F-53FA2FF3B297}"/>
-    <pc:docChg chg="undo custSel addSld delSld modSld sldOrd delMainMaster">
-      <pc:chgData name="MAKANAE Yuki/蒔苗幸(SAF事業 SAFプロジェクト2)" userId="174e2688-ec60-4193-ade0-f39569b7151e" providerId="ADAL" clId="{B448FFF6-F616-42CD-BE9F-53FA2FF3B297}" dt="2026-09-10T08:33:46.843" v="5079" actId="47"/>
-      <pc:docMkLst>
-        <pc:docMk/>
-      </pc:docMkLst>
-      <pc:sldChg chg="modSp del mod">
-        <pc:chgData name="MAKANAE Yuki/蒔苗幸(SAF事業 SAFプロジェクト2)" userId="174e2688-ec60-4193-ade0-f39569b7151e" providerId="ADAL" clId="{B448FFF6-F616-42CD-BE9F-53FA2FF3B297}" dt="2026-09-10T08:33:46.843" v="5079" actId="47"/>
-        <pc:sldMkLst>
-          <pc:docMk/>
-          <pc:sldMk cId="1906196370" sldId="2147483517"/>
-        </pc:sldMkLst>
-        <pc:spChg chg="mod">
-          <ac:chgData name="MAKANAE Yuki/蒔苗幸(SAF事業 SAFプロジェクト2)" userId="174e2688-ec60-4193-ade0-f39569b7151e" providerId="ADAL" clId="{B448FFF6-F616-42CD-BE9F-53FA2FF3B297}" dt="2026-09-10T08:19:14.736" v="4442" actId="20577"/>
-          <ac:spMkLst>
-            <pc:docMk/>
-            <pc:sldMk cId="1906196370" sldId="2147483517"/>
-            <ac:spMk id="5" creationId="{309B7966-D208-BF2E-7AA8-EA02EBFA628C}"/>
-          </ac:spMkLst>
-        </pc:spChg>
-        <pc:spChg chg="mod">
-          <ac:chgData name="MAKANAE Yuki/蒔苗幸(SAF事業 SAFプロジェクト2)" userId="174e2688-ec60-4193-ade0-f39569b7151e" providerId="ADAL" clId="{B448FFF6-F616-42CD-BE9F-53FA2FF3B297}" dt="2026-09-10T08:27:54.784" v="5003" actId="20577"/>
-          <ac:spMkLst>
-            <pc:docMk/>
-            <pc:sldMk cId="1906196370" sldId="2147483517"/>
-            <ac:spMk id="15" creationId="{75C01593-48E1-F00B-2B0C-13A99884EC25}"/>
-          </ac:spMkLst>
-        </pc:spChg>
-      </pc:sldChg>
-      <pc:sldChg chg="addSp delSp modSp mod">
-        <pc:chgData name="MAKANAE Yuki/蒔苗幸(SAF事業 SAFプロジェクト2)" userId="174e2688-ec60-4193-ade0-f39569b7151e" providerId="ADAL" clId="{B448FFF6-F616-42CD-BE9F-53FA2FF3B297}" dt="2026-09-10T08:29:52.498" v="5060"/>
-        <pc:sldMkLst>
-          <pc:docMk/>
-          <pc:sldMk cId="1037385494" sldId="2147483518"/>
-        </pc:sldMkLst>
-        <pc:spChg chg="mod">
-          <ac:chgData name="MAKANAE Yuki/蒔苗幸(SAF事業 SAFプロジェクト2)" userId="174e2688-ec60-4193-ade0-f39569b7151e" providerId="ADAL" clId="{B448FFF6-F616-42CD-BE9F-53FA2FF3B297}" dt="2026-09-10T08:27:59.918" v="5006" actId="20577"/>
-          <ac:spMkLst>
-            <pc:docMk/>
-            <pc:sldMk cId="1037385494" sldId="2147483518"/>
-            <ac:spMk id="2" creationId="{ECAAA3FB-84C5-1883-6475-21AD97F870D3}"/>
-          </ac:spMkLst>
-        </pc:spChg>
-        <pc:spChg chg="add">
-          <ac:chgData name="MAKANAE Yuki/蒔苗幸(SAF事業 SAFプロジェクト2)" userId="174e2688-ec60-4193-ade0-f39569b7151e" providerId="ADAL" clId="{B448FFF6-F616-42CD-BE9F-53FA2FF3B297}" dt="2026-09-10T08:20:34.163" v="4504" actId="11529"/>
-          <ac:spMkLst>
-            <pc:docMk/>
-            <pc:sldMk cId="1037385494" sldId="2147483518"/>
-            <ac:spMk id="3" creationId="{42D85A2D-1ECB-9BDB-FFBD-9B3D494D7F4C}"/>
-          </ac:spMkLst>
-        </pc:spChg>
-        <pc:spChg chg="add mod">
-          <ac:chgData name="MAKANAE Yuki/蒔苗幸(SAF事業 SAFプロジェクト2)" userId="174e2688-ec60-4193-ade0-f39569b7151e" providerId="ADAL" clId="{B448FFF6-F616-42CD-BE9F-53FA2FF3B297}" dt="2026-09-10T08:20:39.808" v="4506" actId="1076"/>
-          <ac:spMkLst>
-            <pc:docMk/>
-            <pc:sldMk cId="1037385494" sldId="2147483518"/>
-            <ac:spMk id="6" creationId="{45F7455F-6481-78E8-0F30-E2B05EE94FB3}"/>
-          </ac:spMkLst>
-        </pc:spChg>
-        <pc:spChg chg="mod">
-          <ac:chgData name="MAKANAE Yuki/蒔苗幸(SAF事業 SAFプロジェクト2)" userId="174e2688-ec60-4193-ade0-f39569b7151e" providerId="ADAL" clId="{B448FFF6-F616-42CD-BE9F-53FA2FF3B297}" dt="2026-09-10T08:20:15.149" v="4503" actId="1038"/>
-          <ac:spMkLst>
-            <pc:docMk/>
-            <pc:sldMk cId="1037385494" sldId="2147483518"/>
-            <ac:spMk id="25" creationId="{B43A5BFE-519E-92EF-7803-30BE6B325C76}"/>
-          </ac:spMkLst>
-        </pc:spChg>
-        <pc:spChg chg="add del mod">
-          <ac:chgData name="MAKANAE Yuki/蒔苗幸(SAF事業 SAFプロジェクト2)" userId="174e2688-ec60-4193-ade0-f39569b7151e" providerId="ADAL" clId="{B448FFF6-F616-42CD-BE9F-53FA2FF3B297}" dt="2026-09-10T08:20:07.067" v="4492" actId="20577"/>
-          <ac:spMkLst>
-            <pc:docMk/>
-            <pc:sldMk cId="1037385494" sldId="2147483518"/>
-            <ac:spMk id="26" creationId="{5825C8FD-F3D8-0838-4703-14A14970AEA7}"/>
-          </ac:spMkLst>
-        </pc:spChg>
-        <pc:spChg chg="mod">
-          <ac:chgData name="MAKANAE Yuki/蒔苗幸(SAF事業 SAFプロジェクト2)" userId="174e2688-ec60-4193-ade0-f39569b7151e" providerId="ADAL" clId="{B448FFF6-F616-42CD-BE9F-53FA2FF3B297}" dt="2026-09-10T08:28:30.643" v="5026" actId="20577"/>
-          <ac:spMkLst>
-            <pc:docMk/>
-            <pc:sldMk cId="1037385494" sldId="2147483518"/>
-            <ac:spMk id="29" creationId="{09F4FF82-6393-76BE-2525-2EB2E3B83BAF}"/>
-          </ac:spMkLst>
-        </pc:spChg>
-        <pc:spChg chg="del mod">
-          <ac:chgData name="MAKANAE Yuki/蒔苗幸(SAF事業 SAFプロジェクト2)" userId="174e2688-ec60-4193-ade0-f39569b7151e" providerId="ADAL" clId="{B448FFF6-F616-42CD-BE9F-53FA2FF3B297}" dt="2026-09-10T08:20:09.588" v="4495"/>
-          <ac:spMkLst>
-            <pc:docMk/>
-            <pc:sldMk cId="1037385494" sldId="2147483518"/>
-            <ac:spMk id="34" creationId="{5B124589-C048-0120-0008-159277E206CF}"/>
-          </ac:spMkLst>
-        </pc:spChg>
-        <pc:graphicFrameChg chg="mod modGraphic">
-          <ac:chgData name="MAKANAE Yuki/蒔苗幸(SAF事業 SAFプロジェクト2)" userId="174e2688-ec60-4193-ade0-f39569b7151e" providerId="ADAL" clId="{B448FFF6-F616-42CD-BE9F-53FA2FF3B297}" dt="2026-09-10T08:29:52.498" v="5060"/>
-          <ac:graphicFrameMkLst>
-            <pc:docMk/>
-            <pc:sldMk cId="1037385494" sldId="2147483518"/>
-            <ac:graphicFrameMk id="27" creationId="{6C9C9EFF-2567-C8C6-79BC-EBDDBFF91811}"/>
-          </ac:graphicFrameMkLst>
-        </pc:graphicFrameChg>
-        <pc:picChg chg="add del mod">
-          <ac:chgData name="MAKANAE Yuki/蒔苗幸(SAF事業 SAFプロジェクト2)" userId="174e2688-ec60-4193-ade0-f39569b7151e" providerId="ADAL" clId="{B448FFF6-F616-42CD-BE9F-53FA2FF3B297}" dt="2026-09-10T08:20:11.187" v="4496" actId="478"/>
-          <ac:picMkLst>
-            <pc:docMk/>
-            <pc:sldMk cId="1037385494" sldId="2147483518"/>
-            <ac:picMk id="10" creationId="{8B2204F5-B7E6-35B6-5A84-FF3304FFA40E}"/>
-          </ac:picMkLst>
-        </pc:picChg>
-        <pc:picChg chg="add del mod">
-          <ac:chgData name="MAKANAE Yuki/蒔苗幸(SAF事業 SAFプロジェクト2)" userId="174e2688-ec60-4193-ade0-f39569b7151e" providerId="ADAL" clId="{B448FFF6-F616-42CD-BE9F-53FA2FF3B297}" dt="2026-09-10T08:20:09.582" v="4493" actId="478"/>
-          <ac:picMkLst>
-            <pc:docMk/>
-            <pc:sldMk cId="1037385494" sldId="2147483518"/>
-            <ac:picMk id="12" creationId="{619988B5-F918-6835-7E6D-C56AD463FF6D}"/>
-          </ac:picMkLst>
-        </pc:picChg>
-      </pc:sldChg>
-      <pc:sldChg chg="addSp delSp modSp mod">
-        <pc:chgData name="MAKANAE Yuki/蒔苗幸(SAF事業 SAFプロジェクト2)" userId="174e2688-ec60-4193-ade0-f39569b7151e" providerId="ADAL" clId="{B448FFF6-F616-42CD-BE9F-53FA2FF3B297}" dt="2026-09-10T08:30:22.522" v="5078" actId="20577"/>
-        <pc:sldMkLst>
-          <pc:docMk/>
-          <pc:sldMk cId="3129593616" sldId="2147483523"/>
-        </pc:sldMkLst>
-        <pc:spChg chg="mod">
-          <ac:chgData name="MAKANAE Yuki/蒔苗幸(SAF事業 SAFプロジェクト2)" userId="174e2688-ec60-4193-ade0-f39569b7151e" providerId="ADAL" clId="{B448FFF6-F616-42CD-BE9F-53FA2FF3B297}" dt="2026-09-10T08:28:06.533" v="5009" actId="20577"/>
-          <ac:spMkLst>
-            <pc:docMk/>
-            <pc:sldMk cId="3129593616" sldId="2147483523"/>
-            <ac:spMk id="2" creationId="{32AF049E-8CE1-A163-9198-C5E6C3CCC31F}"/>
-          </ac:spMkLst>
-        </pc:spChg>
-        <pc:spChg chg="del mod">
-          <ac:chgData name="MAKANAE Yuki/蒔苗幸(SAF事業 SAFプロジェクト2)" userId="174e2688-ec60-4193-ade0-f39569b7151e" providerId="ADAL" clId="{B448FFF6-F616-42CD-BE9F-53FA2FF3B297}" dt="2026-09-10T08:27:12.301" v="4913" actId="478"/>
-          <ac:spMkLst>
-            <pc:docMk/>
-            <pc:sldMk cId="3129593616" sldId="2147483523"/>
-            <ac:spMk id="3" creationId="{78F18DB5-A1CA-2A20-558E-B140AAA880E7}"/>
-          </ac:spMkLst>
-        </pc:spChg>
-        <pc:spChg chg="mod">
-          <ac:chgData name="MAKANAE Yuki/蒔苗幸(SAF事業 SAFプロジェクト2)" userId="174e2688-ec60-4193-ade0-f39569b7151e" providerId="ADAL" clId="{B448FFF6-F616-42CD-BE9F-53FA2FF3B297}" dt="2026-09-08T08:10:15.400" v="4253" actId="1036"/>
-          <ac:spMkLst>
-            <pc:docMk/>
-            <pc:sldMk cId="3129593616" sldId="2147483523"/>
-            <ac:spMk id="5" creationId="{596E8862-5075-D565-DD39-ED5223A77C61}"/>
-          </ac:spMkLst>
-        </pc:spChg>
-        <pc:spChg chg="del mod">
-          <ac:chgData name="MAKANAE Yuki/蒔苗幸(SAF事業 SAFプロジェクト2)" userId="174e2688-ec60-4193-ade0-f39569b7151e" providerId="ADAL" clId="{B448FFF6-F616-42CD-BE9F-53FA2FF3B297}" dt="2026-09-10T08:23:09.986" v="4687"/>
-          <ac:spMkLst>
-            <pc:docMk/>
-            <pc:sldMk cId="3129593616" sldId="2147483523"/>
-            <ac:spMk id="6" creationId="{5F4A1F84-87F3-8881-849A-2C2399881789}"/>
-          </ac:spMkLst>
-        </pc:spChg>
-        <pc:spChg chg="add del mod">
-          <ac:chgData name="MAKANAE Yuki/蒔苗幸(SAF事業 SAFプロジェクト2)" userId="174e2688-ec60-4193-ade0-f39569b7151e" providerId="ADAL" clId="{B448FFF6-F616-42CD-BE9F-53FA2FF3B297}" dt="2026-09-10T08:26:55.384" v="4911" actId="478"/>
-          <ac:spMkLst>
-            <pc:docMk/>
-            <pc:sldMk cId="3129593616" sldId="2147483523"/>
-            <ac:spMk id="8" creationId="{5E10CC97-7968-EFED-55E0-747967374A7E}"/>
-          </ac:spMkLst>
-        </pc:spChg>
-        <pc:spChg chg="del mod">
-          <ac:chgData name="MAKANAE Yuki/蒔苗幸(SAF事業 SAFプロジェクト2)" userId="174e2688-ec60-4193-ade0-f39569b7151e" providerId="ADAL" clId="{B448FFF6-F616-42CD-BE9F-53FA2FF3B297}" dt="2026-09-10T08:26:14.349" v="4905"/>
-          <ac:spMkLst>
-            <pc:docMk/>
-            <pc:sldMk cId="3129593616" sldId="2147483523"/>
-            <ac:spMk id="13" creationId="{6EC86F65-9A90-F276-C312-4DAF3D78A90F}"/>
-          </ac:spMkLst>
-        </pc:spChg>
-        <pc:spChg chg="mod">
-          <ac:chgData name="MAKANAE Yuki/蒔苗幸(SAF事業 SAFプロジェクト2)" userId="174e2688-ec60-4193-ade0-f39569b7151e" providerId="ADAL" clId="{B448FFF6-F616-42CD-BE9F-53FA2FF3B297}" dt="2026-09-10T08:27:24.239" v="4931" actId="20577"/>
-          <ac:spMkLst>
-            <pc:docMk/>
-            <pc:sldMk cId="3129593616" sldId="2147483523"/>
-            <ac:spMk id="16" creationId="{A6DDD5BA-1024-EEA9-5D67-9A3DE24D0834}"/>
-          </ac:spMkLst>
-        </pc:spChg>
-        <pc:spChg chg="mod">
-          <ac:chgData name="MAKANAE Yuki/蒔苗幸(SAF事業 SAFプロジェクト2)" userId="174e2688-ec60-4193-ade0-f39569b7151e" providerId="ADAL" clId="{B448FFF6-F616-42CD-BE9F-53FA2FF3B297}" dt="2026-09-08T08:02:51.378" v="4084" actId="1036"/>
-          <ac:spMkLst>
-            <pc:docMk/>
-            <pc:sldMk cId="3129593616" sldId="2147483523"/>
-            <ac:spMk id="25" creationId="{E7A28858-6039-C42A-3E70-A2EDEB51216D}"/>
-          </ac:spMkLst>
-        </pc:spChg>
-        <pc:spChg chg="mod">
-          <ac:chgData name="MAKANAE Yuki/蒔苗幸(SAF事業 SAFプロジェクト2)" userId="174e2688-ec60-4193-ade0-f39569b7151e" providerId="ADAL" clId="{B448FFF6-F616-42CD-BE9F-53FA2FF3B297}" dt="2026-09-08T08:10:15.400" v="4253" actId="1036"/>
-          <ac:spMkLst>
-            <pc:docMk/>
-            <pc:sldMk cId="3129593616" sldId="2147483523"/>
-            <ac:spMk id="37" creationId="{BF472A19-73AF-E2B3-2B8B-BCDB6477F8D1}"/>
-          </ac:spMkLst>
-        </pc:spChg>
-        <pc:spChg chg="mod">
-          <ac:chgData name="MAKANAE Yuki/蒔苗幸(SAF事業 SAFプロジェクト2)" userId="174e2688-ec60-4193-ade0-f39569b7151e" providerId="ADAL" clId="{B448FFF6-F616-42CD-BE9F-53FA2FF3B297}" dt="2026-09-08T07:00:45.498" v="3142" actId="1036"/>
-          <ac:spMkLst>
-            <pc:docMk/>
-            <pc:sldMk cId="3129593616" sldId="2147483523"/>
-            <ac:spMk id="40" creationId="{55C9FBA7-8DB7-2965-A664-891BD47C87F5}"/>
-          </ac:spMkLst>
-        </pc:spChg>
-        <pc:graphicFrameChg chg="add del mod modGraphic">
-          <ac:chgData name="MAKANAE Yuki/蒔苗幸(SAF事業 SAFプロジェクト2)" userId="174e2688-ec60-4193-ade0-f39569b7151e" providerId="ADAL" clId="{B448FFF6-F616-42CD-BE9F-53FA2FF3B297}" dt="2026-09-10T08:26:55.384" v="4911" actId="478"/>
-          <ac:graphicFrameMkLst>
-            <pc:docMk/>
-            <pc:sldMk cId="3129593616" sldId="2147483523"/>
-            <ac:graphicFrameMk id="14" creationId="{6D219BA9-240A-A0AC-F4F5-D33182A08151}"/>
-          </ac:graphicFrameMkLst>
-        </pc:graphicFrameChg>
-        <pc:graphicFrameChg chg="del mod modGraphic">
-          <ac:chgData name="MAKANAE Yuki/蒔苗幸(SAF事業 SAFプロジェクト2)" userId="174e2688-ec60-4193-ade0-f39569b7151e" providerId="ADAL" clId="{B448FFF6-F616-42CD-BE9F-53FA2FF3B297}" dt="2026-09-10T08:26:55.384" v="4911" actId="478"/>
-          <ac:graphicFrameMkLst>
-            <pc:docMk/>
-            <pc:sldMk cId="3129593616" sldId="2147483523"/>
-            <ac:graphicFrameMk id="15" creationId="{DEF53646-A5E0-56A9-22CD-22ACF9CC4DE2}"/>
-          </ac:graphicFrameMkLst>
-        </pc:graphicFrameChg>
-        <pc:graphicFrameChg chg="modGraphic">
-          <ac:chgData name="MAKANAE Yuki/蒔苗幸(SAF事業 SAFプロジェクト2)" userId="174e2688-ec60-4193-ade0-f39569b7151e" providerId="ADAL" clId="{B448FFF6-F616-42CD-BE9F-53FA2FF3B297}" dt="2026-09-10T08:30:22.522" v="5078" actId="20577"/>
-          <ac:graphicFrameMkLst>
-            <pc:docMk/>
-            <pc:sldMk cId="3129593616" sldId="2147483523"/>
-            <ac:graphicFrameMk id="17" creationId="{0C2089FE-A3B3-4D3B-74B7-010229509D53}"/>
-          </ac:graphicFrameMkLst>
-        </pc:graphicFrameChg>
-        <pc:graphicFrameChg chg="mod modGraphic">
-          <ac:chgData name="MAKANAE Yuki/蒔苗幸(SAF事業 SAFプロジェクト2)" userId="174e2688-ec60-4193-ade0-f39569b7151e" providerId="ADAL" clId="{B448FFF6-F616-42CD-BE9F-53FA2FF3B297}" dt="2026-09-10T08:27:44.142" v="4988" actId="20577"/>
-          <ac:graphicFrameMkLst>
-            <pc:docMk/>
-            <pc:sldMk cId="3129593616" sldId="2147483523"/>
-            <ac:graphicFrameMk id="18" creationId="{84081B6C-F78C-8804-91BD-FBB887372773}"/>
-          </ac:graphicFrameMkLst>
-        </pc:graphicFrameChg>
-      </pc:sldChg>
-      <pc:sldMasterChg chg="del delSldLayout">
-        <pc:chgData name="MAKANAE Yuki/蒔苗幸(SAF事業 SAFプロジェクト2)" userId="174e2688-ec60-4193-ade0-f39569b7151e" providerId="ADAL" clId="{B448FFF6-F616-42CD-BE9F-53FA2FF3B297}" dt="2026-09-10T08:33:46.843" v="5079" actId="47"/>
-        <pc:sldMasterMkLst>
-          <pc:docMk/>
-          <pc:sldMasterMk cId="759634223" sldId="2147483648"/>
-        </pc:sldMasterMkLst>
-        <pc:sldLayoutChg chg="del">
-          <pc:chgData name="MAKANAE Yuki/蒔苗幸(SAF事業 SAFプロジェクト2)" userId="174e2688-ec60-4193-ade0-f39569b7151e" providerId="ADAL" clId="{B448FFF6-F616-42CD-BE9F-53FA2FF3B297}" dt="2026-09-10T08:33:46.843" v="5079" actId="47"/>
-          <pc:sldLayoutMkLst>
-            <pc:docMk/>
-            <pc:sldMasterMk cId="759634223" sldId="2147483648"/>
-            <pc:sldLayoutMk cId="3337989416" sldId="2147483649"/>
-          </pc:sldLayoutMkLst>
-        </pc:sldLayoutChg>
-        <pc:sldLayoutChg chg="del">
-          <pc:chgData name="MAKANAE Yuki/蒔苗幸(SAF事業 SAFプロジェクト2)" userId="174e2688-ec60-4193-ade0-f39569b7151e" providerId="ADAL" clId="{B448FFF6-F616-42CD-BE9F-53FA2FF3B297}" dt="2026-09-10T08:33:46.843" v="5079" actId="47"/>
-          <pc:sldLayoutMkLst>
-            <pc:docMk/>
-            <pc:sldMasterMk cId="759634223" sldId="2147483648"/>
-            <pc:sldLayoutMk cId="3939527058" sldId="2147483650"/>
-          </pc:sldLayoutMkLst>
-        </pc:sldLayoutChg>
-        <pc:sldLayoutChg chg="del">
-          <pc:chgData name="MAKANAE Yuki/蒔苗幸(SAF事業 SAFプロジェクト2)" userId="174e2688-ec60-4193-ade0-f39569b7151e" providerId="ADAL" clId="{B448FFF6-F616-42CD-BE9F-53FA2FF3B297}" dt="2026-09-10T08:33:46.843" v="5079" actId="47"/>
-          <pc:sldLayoutMkLst>
-            <pc:docMk/>
-            <pc:sldMasterMk cId="759634223" sldId="2147483648"/>
-            <pc:sldLayoutMk cId="2810021754" sldId="2147483651"/>
-          </pc:sldLayoutMkLst>
-        </pc:sldLayoutChg>
-        <pc:sldLayoutChg chg="del">
-          <pc:chgData name="MAKANAE Yuki/蒔苗幸(SAF事業 SAFプロジェクト2)" userId="174e2688-ec60-4193-ade0-f39569b7151e" providerId="ADAL" clId="{B448FFF6-F616-42CD-BE9F-53FA2FF3B297}" dt="2026-09-10T08:33:46.843" v="5079" actId="47"/>
-          <pc:sldLayoutMkLst>
-            <pc:docMk/>
-            <pc:sldMasterMk cId="759634223" sldId="2147483648"/>
-            <pc:sldLayoutMk cId="1011399940" sldId="2147483652"/>
-          </pc:sldLayoutMkLst>
-        </pc:sldLayoutChg>
-        <pc:sldLayoutChg chg="del">
-          <pc:chgData name="MAKANAE Yuki/蒔苗幸(SAF事業 SAFプロジェクト2)" userId="174e2688-ec60-4193-ade0-f39569b7151e" providerId="ADAL" clId="{B448FFF6-F616-42CD-BE9F-53FA2FF3B297}" dt="2026-09-10T08:33:46.843" v="5079" actId="47"/>
-          <pc:sldLayoutMkLst>
-            <pc:docMk/>
-            <pc:sldMasterMk cId="759634223" sldId="2147483648"/>
-            <pc:sldLayoutMk cId="1219761649" sldId="2147483653"/>
-          </pc:sldLayoutMkLst>
-        </pc:sldLayoutChg>
-        <pc:sldLayoutChg chg="del">
-          <pc:chgData name="MAKANAE Yuki/蒔苗幸(SAF事業 SAFプロジェクト2)" userId="174e2688-ec60-4193-ade0-f39569b7151e" providerId="ADAL" clId="{B448FFF6-F616-42CD-BE9F-53FA2FF3B297}" dt="2026-09-10T08:33:46.843" v="5079" actId="47"/>
-          <pc:sldLayoutMkLst>
-            <pc:docMk/>
-            <pc:sldMasterMk cId="759634223" sldId="2147483648"/>
-            <pc:sldLayoutMk cId="3403564385" sldId="2147483654"/>
-          </pc:sldLayoutMkLst>
-        </pc:sldLayoutChg>
-        <pc:sldLayoutChg chg="del">
-          <pc:chgData name="MAKANAE Yuki/蒔苗幸(SAF事業 SAFプロジェクト2)" userId="174e2688-ec60-4193-ade0-f39569b7151e" providerId="ADAL" clId="{B448FFF6-F616-42CD-BE9F-53FA2FF3B297}" dt="2026-09-10T08:33:46.843" v="5079" actId="47"/>
-          <pc:sldLayoutMkLst>
-            <pc:docMk/>
-            <pc:sldMasterMk cId="759634223" sldId="2147483648"/>
-            <pc:sldLayoutMk cId="1032682285" sldId="2147483655"/>
-          </pc:sldLayoutMkLst>
-        </pc:sldLayoutChg>
-        <pc:sldLayoutChg chg="del">
-          <pc:chgData name="MAKANAE Yuki/蒔苗幸(SAF事業 SAFプロジェクト2)" userId="174e2688-ec60-4193-ade0-f39569b7151e" providerId="ADAL" clId="{B448FFF6-F616-42CD-BE9F-53FA2FF3B297}" dt="2026-09-10T08:33:46.843" v="5079" actId="47"/>
-          <pc:sldLayoutMkLst>
-            <pc:docMk/>
-            <pc:sldMasterMk cId="759634223" sldId="2147483648"/>
-            <pc:sldLayoutMk cId="2425065774" sldId="2147483656"/>
-          </pc:sldLayoutMkLst>
-        </pc:sldLayoutChg>
-        <pc:sldLayoutChg chg="del">
-          <pc:chgData name="MAKANAE Yuki/蒔苗幸(SAF事業 SAFプロジェクト2)" userId="174e2688-ec60-4193-ade0-f39569b7151e" providerId="ADAL" clId="{B448FFF6-F616-42CD-BE9F-53FA2FF3B297}" dt="2026-09-10T08:33:46.843" v="5079" actId="47"/>
-          <pc:sldLayoutMkLst>
-            <pc:docMk/>
-            <pc:sldMasterMk cId="759634223" sldId="2147483648"/>
-            <pc:sldLayoutMk cId="2280634" sldId="2147483657"/>
-          </pc:sldLayoutMkLst>
-        </pc:sldLayoutChg>
-        <pc:sldLayoutChg chg="del">
-          <pc:chgData name="MAKANAE Yuki/蒔苗幸(SAF事業 SAFプロジェクト2)" userId="174e2688-ec60-4193-ade0-f39569b7151e" providerId="ADAL" clId="{B448FFF6-F616-42CD-BE9F-53FA2FF3B297}" dt="2026-09-10T08:33:46.843" v="5079" actId="47"/>
-          <pc:sldLayoutMkLst>
-            <pc:docMk/>
-            <pc:sldMasterMk cId="759634223" sldId="2147483648"/>
-            <pc:sldLayoutMk cId="2550643054" sldId="2147483658"/>
-          </pc:sldLayoutMkLst>
-        </pc:sldLayoutChg>
-        <pc:sldLayoutChg chg="del">
-          <pc:chgData name="MAKANAE Yuki/蒔苗幸(SAF事業 SAFプロジェクト2)" userId="174e2688-ec60-4193-ade0-f39569b7151e" providerId="ADAL" clId="{B448FFF6-F616-42CD-BE9F-53FA2FF3B297}" dt="2026-09-10T08:33:46.843" v="5079" actId="47"/>
-          <pc:sldLayoutMkLst>
-            <pc:docMk/>
-            <pc:sldMasterMk cId="759634223" sldId="2147483648"/>
-            <pc:sldLayoutMk cId="2560536408" sldId="2147483659"/>
-          </pc:sldLayoutMkLst>
-        </pc:sldLayoutChg>
-        <pc:sldLayoutChg chg="del">
-          <pc:chgData name="MAKANAE Yuki/蒔苗幸(SAF事業 SAFプロジェクト2)" userId="174e2688-ec60-4193-ade0-f39569b7151e" providerId="ADAL" clId="{B448FFF6-F616-42CD-BE9F-53FA2FF3B297}" dt="2026-09-10T08:33:46.843" v="5079" actId="47"/>
-          <pc:sldLayoutMkLst>
-            <pc:docMk/>
-            <pc:sldMasterMk cId="759634223" sldId="2147483648"/>
-            <pc:sldLayoutMk cId="4079685960" sldId="2147483660"/>
-          </pc:sldLayoutMkLst>
-        </pc:sldLayoutChg>
-      </pc:sldMasterChg>
-    </pc:docChg>
-  </pc:docChgLst>
-</pc:chgInfo>
 </file>
 
 <file path=ppt/notesMasters/notesMaster1.xml><?xml version="1.0" encoding="utf-8"?>
@@ -1345,7 +991,7 @@
             <a:pPr defTabSz="914400"/>
             <a:r>
               <a:rPr lang="en-US" altLang="ja-JP"/>
-              <a:t>Copyright © ENEOS Corporation  All Rights Reserved.</a:t>
+              <a:t/>
             </a:r>
             <a:endParaRPr lang="ja-JP" altLang="ja-JP"/>
           </a:p>
@@ -1463,7 +1109,7 @@
             <a:pPr defTabSz="914400"/>
             <a:r>
               <a:rPr lang="en-US" altLang="ja-JP"/>
-              <a:t>Copyright © ENEOS Corporation  All Rights Reserved.</a:t>
+              <a:t/>
             </a:r>
             <a:endParaRPr lang="ja-JP" altLang="ja-JP"/>
           </a:p>
@@ -2007,7 +1653,7 @@
                 <a:cs typeface="+mn-cs"/>
                 <a:sym typeface="Trebuchet MS" panose="020B0603020202020204" pitchFamily="34" charset="0"/>
               </a:rPr>
-              <a:t>Copyright © ENEOS Corporation  All Rights Reserved.</a:t>
+              <a:t/>
             </a:r>
             <a:endParaRPr kumimoji="0" lang="ja-JP" altLang="ja-JP" sz="700" b="0" i="0" u="none" strike="noStrike" kern="1200" cap="none" spc="0" normalizeH="0" baseline="0" noProof="0">
               <a:ln>
@@ -2456,7 +2102,7 @@
             <a:pPr defTabSz="914400"/>
             <a:r>
               <a:rPr lang="en-US" altLang="ja-JP"/>
-              <a:t>Copyright © ENEOS Corporation  All Rights Reserved.</a:t>
+              <a:t/>
             </a:r>
             <a:endParaRPr lang="ja-JP" altLang="ja-JP"/>
           </a:p>
@@ -2961,7 +2607,7 @@
                 <a:ea typeface="メイリオ"/>
                 <a:cs typeface="+mn-cs"/>
               </a:rPr>
-              <a:t>株価のの推移（</a:t>
+              <a:t>株価の推移（</a:t>
             </a:r>
             <a:r>
               <a:rPr kumimoji="0" lang="en-US" altLang="ja-JP" sz="1600" b="1" i="0" u="sng" strike="noStrike" kern="0" cap="none" spc="0" normalizeH="0" baseline="0" noProof="0" dirty="0">
@@ -11812,7 +11458,7 @@
         <a:srgbClr val="954F72"/>
       </a:folHlink>
     </a:clrScheme>
-    <a:fontScheme name="ENEOS‗J">
+    <a:fontScheme name="Office">
       <a:majorFont>
         <a:latin typeface="メイリオ"/>
         <a:ea typeface="メイリオ"/>
@@ -12285,275 +11931,4 @@
     </a:ext>
   </a:extLst>
 </a:theme>
-</file>
-
-<file path=customXml/item1.xml><?xml version="1.0" encoding="utf-8"?>
-<ct:contentTypeSchema xmlns:ct="http://schemas.microsoft.com/office/2006/metadata/contentType" xmlns:ma="http://schemas.microsoft.com/office/2006/metadata/properties/metaAttributes" ct:_="" ma:_="" ma:contentTypeName="ドキュメント" ma:contentTypeID="0x0101001BE02DD73035B44196851BB6D61E50B3" ma:contentTypeVersion="13" ma:contentTypeDescription="新しいドキュメントを作成します。" ma:contentTypeScope="" ma:versionID="3f6f801ec9f1559ed1e068de175018f7">
-  <xsd:schema xmlns:xsd="http://www.w3.org/2001/XMLSchema" xmlns:xs="http://www.w3.org/2001/XMLSchema" xmlns:p="http://schemas.microsoft.com/office/2006/metadata/properties" xmlns:ns2="9e98f6d5-9822-498a-8fbb-927a443709d0" xmlns:ns3="67304d4a-4984-417c-9c48-52e85c80973b" targetNamespace="http://schemas.microsoft.com/office/2006/metadata/properties" ma:root="true" ma:fieldsID="c291c8fd699206128ba2a935de4f1da5" ns2:_="" ns3:_="">
-    <xsd:import namespace="9e98f6d5-9822-498a-8fbb-927a443709d0"/>
-    <xsd:import namespace="67304d4a-4984-417c-9c48-52e85c80973b"/>
-    <xsd:element name="properties">
-      <xsd:complexType>
-        <xsd:sequence>
-          <xsd:element name="documentManagement">
-            <xsd:complexType>
-              <xsd:all>
-                <xsd:element ref="ns2:MediaServiceMetadata" minOccurs="0"/>
-                <xsd:element ref="ns2:MediaServiceFastMetadata" minOccurs="0"/>
-                <xsd:element ref="ns2:MediaServiceSearchProperties" minOccurs="0"/>
-                <xsd:element ref="ns2:MediaServiceDateTaken" minOccurs="0"/>
-                <xsd:element ref="ns2:MediaServiceLocation" minOccurs="0"/>
-                <xsd:element ref="ns2:MediaServiceGenerationTime" minOccurs="0"/>
-                <xsd:element ref="ns2:MediaServiceEventHashCode" minOccurs="0"/>
-                <xsd:element ref="ns2:MediaLengthInSeconds" minOccurs="0"/>
-                <xsd:element ref="ns2:MediaServiceOCR" minOccurs="0"/>
-                <xsd:element ref="ns2:lcf76f155ced4ddcb4097134ff3c332f" minOccurs="0"/>
-                <xsd:element ref="ns3:TaxCatchAll" minOccurs="0"/>
-                <xsd:element ref="ns2:MediaServiceBillingMetadata" minOccurs="0"/>
-              </xsd:all>
-            </xsd:complexType>
-          </xsd:element>
-        </xsd:sequence>
-      </xsd:complexType>
-    </xsd:element>
-  </xsd:schema>
-  <xsd:schema xmlns:xsd="http://www.w3.org/2001/XMLSchema" xmlns:xs="http://www.w3.org/2001/XMLSchema" xmlns:dms="http://schemas.microsoft.com/office/2006/documentManagement/types" xmlns:pc="http://schemas.microsoft.com/office/infopath/2007/PartnerControls" targetNamespace="9e98f6d5-9822-498a-8fbb-927a443709d0" elementFormDefault="qualified">
-    <xsd:import namespace="http://schemas.microsoft.com/office/2006/documentManagement/types"/>
-    <xsd:import namespace="http://schemas.microsoft.com/office/infopath/2007/PartnerControls"/>
-    <xsd:element name="MediaServiceMetadata" ma:index="8" nillable="true" ma:displayName="MediaServiceMetadata" ma:hidden="true" ma:internalName="MediaServiceMetadata" ma:readOnly="true">
-      <xsd:simpleType>
-        <xsd:restriction base="dms:Note"/>
-      </xsd:simpleType>
-    </xsd:element>
-    <xsd:element name="MediaServiceFastMetadata" ma:index="9" nillable="true" ma:displayName="MediaServiceFastMetadata" ma:hidden="true" ma:internalName="MediaServiceFastMetadata" ma:readOnly="true">
-      <xsd:simpleType>
-        <xsd:restriction base="dms:Note"/>
-      </xsd:simpleType>
-    </xsd:element>
-    <xsd:element name="MediaServiceSearchProperties" ma:index="10" nillable="true" ma:displayName="MediaServiceSearchProperties" ma:hidden="true" ma:internalName="MediaServiceSearchProperties" ma:readOnly="true">
-      <xsd:simpleType>
-        <xsd:restriction base="dms:Note"/>
-      </xsd:simpleType>
-    </xsd:element>
-    <xsd:element name="MediaServiceDateTaken" ma:index="11" nillable="true" ma:displayName="MediaServiceDateTaken" ma:hidden="true" ma:indexed="true" ma:internalName="MediaServiceDateTaken" ma:readOnly="true">
-      <xsd:simpleType>
-        <xsd:restriction base="dms:Text"/>
-      </xsd:simpleType>
-    </xsd:element>
-    <xsd:element name="MediaServiceLocation" ma:index="12" nillable="true" ma:displayName="Location" ma:indexed="true" ma:internalName="MediaServiceLocation" ma:readOnly="true">
-      <xsd:simpleType>
-        <xsd:restriction base="dms:Text"/>
-      </xsd:simpleType>
-    </xsd:element>
-    <xsd:element name="MediaServiceGenerationTime" ma:index="13" nillable="true" ma:displayName="MediaServiceGenerationTime" ma:hidden="true" ma:internalName="MediaServiceGenerationTime" ma:readOnly="true">
-      <xsd:simpleType>
-        <xsd:restriction base="dms:Text"/>
-      </xsd:simpleType>
-    </xsd:element>
-    <xsd:element name="MediaServiceEventHashCode" ma:index="14" nillable="true" ma:displayName="MediaServiceEventHashCode" ma:hidden="true" ma:internalName="MediaServiceEventHashCode" ma:readOnly="true">
-      <xsd:simpleType>
-        <xsd:restriction base="dms:Text"/>
-      </xsd:simpleType>
-    </xsd:element>
-    <xsd:element name="MediaLengthInSeconds" ma:index="15" nillable="true" ma:displayName="MediaLengthInSeconds" ma:hidden="true" ma:internalName="MediaLengthInSeconds" ma:readOnly="true">
-      <xsd:simpleType>
-        <xsd:restriction base="dms:Unknown"/>
-      </xsd:simpleType>
-    </xsd:element>
-    <xsd:element name="MediaServiceOCR" ma:index="16" nillable="true" ma:displayName="Extracted Text" ma:internalName="MediaServiceOCR" ma:readOnly="true">
-      <xsd:simpleType>
-        <xsd:restriction base="dms:Note">
-          <xsd:maxLength value="255"/>
-        </xsd:restriction>
-      </xsd:simpleType>
-    </xsd:element>
-    <xsd:element name="lcf76f155ced4ddcb4097134ff3c332f" ma:index="18" nillable="true" ma:taxonomy="true" ma:internalName="lcf76f155ced4ddcb4097134ff3c332f" ma:taxonomyFieldName="MediaServiceImageTags" ma:displayName="画像タグ" ma:readOnly="false" ma:fieldId="{5cf76f15-5ced-4ddc-b409-7134ff3c332f}" ma:taxonomyMulti="true" ma:sspId="26cf7d4e-78a9-41ff-a4cd-577c4b3a939e" ma:termSetId="09814cd3-568e-fe90-9814-8d621ff8fb84" ma:anchorId="fba54fb3-c3e1-fe81-a776-ca4b69148c4d" ma:open="true" ma:isKeyword="false">
-      <xsd:complexType>
-        <xsd:sequence>
-          <xsd:element ref="pc:Terms" minOccurs="0" maxOccurs="1"/>
-        </xsd:sequence>
-      </xsd:complexType>
-    </xsd:element>
-    <xsd:element name="MediaServiceBillingMetadata" ma:index="20" nillable="true" ma:displayName="MediaServiceBillingMetadata" ma:hidden="true" ma:internalName="MediaServiceBillingMetadata" ma:readOnly="true">
-      <xsd:simpleType>
-        <xsd:restriction base="dms:Note"/>
-      </xsd:simpleType>
-    </xsd:element>
-  </xsd:schema>
-  <xsd:schema xmlns:xsd="http://www.w3.org/2001/XMLSchema" xmlns:xs="http://www.w3.org/2001/XMLSchema" xmlns:dms="http://schemas.microsoft.com/office/2006/documentManagement/types" xmlns:pc="http://schemas.microsoft.com/office/infopath/2007/PartnerControls" targetNamespace="67304d4a-4984-417c-9c48-52e85c80973b" elementFormDefault="qualified">
-    <xsd:import namespace="http://schemas.microsoft.com/office/2006/documentManagement/types"/>
-    <xsd:import namespace="http://schemas.microsoft.com/office/infopath/2007/PartnerControls"/>
-    <xsd:element name="TaxCatchAll" ma:index="19" nillable="true" ma:displayName="Taxonomy Catch All Column" ma:hidden="true" ma:list="{f8a518a8-2f9a-4aaa-940b-429fb572e66c}" ma:internalName="TaxCatchAll" ma:showField="CatchAllData" ma:web="67304d4a-4984-417c-9c48-52e85c80973b">
-      <xsd:complexType>
-        <xsd:complexContent>
-          <xsd:extension base="dms:MultiChoiceLookup">
-            <xsd:sequence>
-              <xsd:element name="Value" type="dms:Lookup" maxOccurs="unbounded" minOccurs="0" nillable="true"/>
-            </xsd:sequence>
-          </xsd:extension>
-        </xsd:complexContent>
-      </xsd:complexType>
-    </xsd:element>
-  </xsd:schema>
-  <xsd:schema xmlns="http://schemas.openxmlformats.org/package/2006/metadata/core-properties" xmlns:xsd="http://www.w3.org/2001/XMLSchema" xmlns:xsi="http://www.w3.org/2001/XMLSchema-instance" xmlns:dc="http://purl.org/dc/elements/1.1/" xmlns:dcterms="http://purl.org/dc/terms/" xmlns:odoc="http://schemas.microsoft.com/internal/obd" targetNamespace="http://schemas.openxmlformats.org/package/2006/metadata/core-properties" elementFormDefault="qualified" attributeFormDefault="unqualified" blockDefault="#all">
-    <xsd:import namespace="http://purl.org/dc/elements/1.1/" schemaLocation="http://dublincore.org/schemas/xmls/qdc/2003/04/02/dc.xsd"/>
-    <xsd:import namespace="http://purl.org/dc/terms/" schemaLocation="http://dublincore.org/schemas/xmls/qdc/2003/04/02/dcterms.xsd"/>
-    <xsd:element name="coreProperties" type="CT_coreProperties"/>
-    <xsd:complexType name="CT_coreProperties">
-      <xsd:all>
-        <xsd:element ref="dc:creator" minOccurs="0" maxOccurs="1"/>
-        <xsd:element ref="dcterms:created" minOccurs="0" maxOccurs="1"/>
-        <xsd:element ref="dc:identifier" minOccurs="0" maxOccurs="1"/>
-        <xsd:element name="contentType" minOccurs="0" maxOccurs="1" type="xsd:string" ma:index="0" ma:displayName="コンテンツ タイプ"/>
-        <xsd:element ref="dc:title" minOccurs="0" maxOccurs="1" ma:index="4" ma:displayName="タイトル"/>
-        <xsd:element ref="dc:subject" minOccurs="0" maxOccurs="1"/>
-        <xsd:element ref="dc:description" minOccurs="0" maxOccurs="1"/>
-        <xsd:element name="keywords" minOccurs="0" maxOccurs="1" type="xsd:string"/>
-        <xsd:element ref="dc:language" minOccurs="0" maxOccurs="1"/>
-        <xsd:element name="category" minOccurs="0" maxOccurs="1" type="xsd:string"/>
-        <xsd:element name="version" minOccurs="0" maxOccurs="1" type="xsd:string"/>
-        <xsd:element name="revision" minOccurs="0" maxOccurs="1" type="xsd:string">
-          <xsd:annotation>
-            <xsd:documentation>
-                        This value indicates the number of saves or revisions. The application is responsible for updating this value after each revision.
-                    </xsd:documentation>
-          </xsd:annotation>
-        </xsd:element>
-        <xsd:element name="lastModifiedBy" minOccurs="0" maxOccurs="1" type="xsd:string"/>
-        <xsd:element ref="dcterms:modified" minOccurs="0" maxOccurs="1"/>
-        <xsd:element name="contentStatus" minOccurs="0" maxOccurs="1" type="xsd:string"/>
-      </xsd:all>
-    </xsd:complexType>
-  </xsd:schema>
-  <xs:schema xmlns:pc="http://schemas.microsoft.com/office/infopath/2007/PartnerControls" xmlns:xs="http://www.w3.org/2001/XMLSchema" targetNamespace="http://schemas.microsoft.com/office/infopath/2007/PartnerControls" elementFormDefault="qualified" attributeFormDefault="unqualified">
-    <xs:element name="Person">
-      <xs:complexType>
-        <xs:sequence>
-          <xs:element ref="pc:DisplayName" minOccurs="0"/>
-          <xs:element ref="pc:AccountId" minOccurs="0"/>
-          <xs:element ref="pc:AccountType" minOccurs="0"/>
-        </xs:sequence>
-      </xs:complexType>
-    </xs:element>
-    <xs:element name="DisplayName" type="xs:string"/>
-    <xs:element name="AccountId" type="xs:string"/>
-    <xs:element name="AccountType" type="xs:string"/>
-    <xs:element name="BDCAssociatedEntity">
-      <xs:complexType>
-        <xs:sequence>
-          <xs:element ref="pc:BDCEntity" minOccurs="0" maxOccurs="unbounded"/>
-        </xs:sequence>
-        <xs:attribute ref="pc:EntityNamespace"/>
-        <xs:attribute ref="pc:EntityName"/>
-        <xs:attribute ref="pc:SystemInstanceName"/>
-        <xs:attribute ref="pc:AssociationName"/>
-      </xs:complexType>
-    </xs:element>
-    <xs:attribute name="EntityNamespace" type="xs:string"/>
-    <xs:attribute name="EntityName" type="xs:string"/>
-    <xs:attribute name="SystemInstanceName" type="xs:string"/>
-    <xs:attribute name="AssociationName" type="xs:string"/>
-    <xs:element name="BDCEntity">
-      <xs:complexType>
-        <xs:sequence>
-          <xs:element ref="pc:EntityDisplayName" minOccurs="0"/>
-          <xs:element ref="pc:EntityInstanceReference" minOccurs="0"/>
-          <xs:element ref="pc:EntityId1" minOccurs="0"/>
-          <xs:element ref="pc:EntityId2" minOccurs="0"/>
-          <xs:element ref="pc:EntityId3" minOccurs="0"/>
-          <xs:element ref="pc:EntityId4" minOccurs="0"/>
-          <xs:element ref="pc:EntityId5" minOccurs="0"/>
-        </xs:sequence>
-      </xs:complexType>
-    </xs:element>
-    <xs:element name="EntityDisplayName" type="xs:string"/>
-    <xs:element name="EntityInstanceReference" type="xs:string"/>
-    <xs:element name="EntityId1" type="xs:string"/>
-    <xs:element name="EntityId2" type="xs:string"/>
-    <xs:element name="EntityId3" type="xs:string"/>
-    <xs:element name="EntityId4" type="xs:string"/>
-    <xs:element name="EntityId5" type="xs:string"/>
-    <xs:element name="Terms">
-      <xs:complexType>
-        <xs:sequence>
-          <xs:element ref="pc:TermInfo" minOccurs="0" maxOccurs="unbounded"/>
-        </xs:sequence>
-      </xs:complexType>
-    </xs:element>
-    <xs:element name="TermInfo">
-      <xs:complexType>
-        <xs:sequence>
-          <xs:element ref="pc:TermName" minOccurs="0"/>
-          <xs:element ref="pc:TermId" minOccurs="0"/>
-        </xs:sequence>
-      </xs:complexType>
-    </xs:element>
-    <xs:element name="TermName" type="xs:string"/>
-    <xs:element name="TermId" type="xs:string"/>
-  </xs:schema>
-</ct:contentTypeSchema>
-</file>
-
-<file path=customXml/item2.xml><?xml version="1.0" encoding="utf-8"?>
-<?mso-contentType ?>
-<FormTemplates xmlns="http://schemas.microsoft.com/sharepoint/v3/contenttype/forms">
-  <Display>DocumentLibraryForm</Display>
-  <Edit>DocumentLibraryForm</Edit>
-  <New>DocumentLibraryForm</New>
-</FormTemplates>
-</file>
-
-<file path=customXml/item3.xml><?xml version="1.0" encoding="utf-8"?>
-<p:properties xmlns:p="http://schemas.microsoft.com/office/2006/metadata/properties" xmlns:xsi="http://www.w3.org/2001/XMLSchema-instance" xmlns:pc="http://schemas.microsoft.com/office/infopath/2007/PartnerControls">
-  <documentManagement>
-    <lcf76f155ced4ddcb4097134ff3c332f xmlns="9e98f6d5-9822-498a-8fbb-927a443709d0">
-      <Terms xmlns="http://schemas.microsoft.com/office/infopath/2007/PartnerControls"/>
-    </lcf76f155ced4ddcb4097134ff3c332f>
-    <TaxCatchAll xmlns="67304d4a-4984-417c-9c48-52e85c80973b" xsi:nil="true"/>
-  </documentManagement>
-</p:properties>
-</file>
-
-<file path=customXml/itemProps1.xml><?xml version="1.0" encoding="utf-8"?>
-<ds:datastoreItem xmlns:ds="http://schemas.openxmlformats.org/officeDocument/2006/customXml" ds:itemID="{AB5ECF2F-65DD-4A54-AD91-64D41E13F8D6}">
-  <ds:schemaRefs>
-    <ds:schemaRef ds:uri="http://schemas.microsoft.com/office/2006/metadata/contentType"/>
-    <ds:schemaRef ds:uri="http://schemas.microsoft.com/office/2006/metadata/properties/metaAttributes"/>
-    <ds:schemaRef ds:uri="http://www.w3.org/2001/XMLSchema"/>
-    <ds:schemaRef ds:uri="http://schemas.microsoft.com/office/2006/metadata/properties"/>
-    <ds:schemaRef ds:uri="9e98f6d5-9822-498a-8fbb-927a443709d0"/>
-    <ds:schemaRef ds:uri="67304d4a-4984-417c-9c48-52e85c80973b"/>
-    <ds:schemaRef ds:uri="http://schemas.microsoft.com/office/2006/documentManagement/types"/>
-    <ds:schemaRef ds:uri="http://schemas.microsoft.com/office/infopath/2007/PartnerControls"/>
-    <ds:schemaRef ds:uri="http://schemas.openxmlformats.org/package/2006/metadata/core-properties"/>
-    <ds:schemaRef ds:uri="http://purl.org/dc/elements/1.1/"/>
-    <ds:schemaRef ds:uri="http://purl.org/dc/terms/"/>
-    <ds:schemaRef ds:uri="http://schemas.microsoft.com/internal/obd"/>
-  </ds:schemaRefs>
-</ds:datastoreItem>
-</file>
-
-<file path=customXml/itemProps2.xml><?xml version="1.0" encoding="utf-8"?>
-<ds:datastoreItem xmlns:ds="http://schemas.openxmlformats.org/officeDocument/2006/customXml" ds:itemID="{F43385CE-0C5C-48B0-B2B5-A13D432B1409}">
-  <ds:schemaRefs>
-    <ds:schemaRef ds:uri="http://schemas.microsoft.com/sharepoint/v3/contenttype/forms"/>
-  </ds:schemaRefs>
-</ds:datastoreItem>
-</file>
-
-<file path=customXml/itemProps3.xml><?xml version="1.0" encoding="utf-8"?>
-<ds:datastoreItem xmlns:ds="http://schemas.openxmlformats.org/officeDocument/2006/customXml" ds:itemID="{FE569AA4-6778-46DA-8A40-B435C2C4DAD0}">
-  <ds:schemaRefs>
-    <ds:schemaRef ds:uri="67304d4a-4984-417c-9c48-52e85c80973b"/>
-    <ds:schemaRef ds:uri="9e98f6d5-9822-498a-8fbb-927a443709d0"/>
-    <ds:schemaRef ds:uri="http://purl.org/dc/dcmitype/"/>
-    <ds:schemaRef ds:uri="http://purl.org/dc/elements/1.1/"/>
-    <ds:schemaRef ds:uri="http://purl.org/dc/terms/"/>
-    <ds:schemaRef ds:uri="http://schemas.microsoft.com/office/2006/documentManagement/types"/>
-    <ds:schemaRef ds:uri="http://schemas.microsoft.com/office/2006/metadata/properties"/>
-    <ds:schemaRef ds:uri="http://schemas.microsoft.com/office/infopath/2007/PartnerControls"/>
-    <ds:schemaRef ds:uri="http://schemas.openxmlformats.org/package/2006/metadata/core-properties"/>
-    <ds:schemaRef ds:uri="http://www.w3.org/XML/1998/namespace"/>
-  </ds:schemaRefs>
-</ds:datastoreItem>
 </file>